--- a/auca/Sem-6/introduction to big data/group_work/week3/Exploratory_Data_Analysis_Slides.pptx
+++ b/auca/Sem-6/introduction to big data/group_work/week3/Exploratory_Data_Analysis_Slides.pptx
@@ -4757,7 +4757,7 @@
               <a:buNone/>
             </a:pPr>
             <a:r>
-              <a:rPr lang="en-US" sz="4800" b="1" dirty="0">
+              <a:rPr lang="en-US" sz="4000" b="1" dirty="0" smtClean="0">
                 <a:solidFill>
                   <a:srgbClr val="FFFFFF"/>
                 </a:solidFill>
@@ -4765,9 +4765,9 @@
                 <a:ea typeface="Cambria" pitchFamily="34" charset="-122"/>
                 <a:cs typeface="Cambria" pitchFamily="34" charset="-120"/>
               </a:rPr>
-              <a:t>Quiz time!</a:t>
-            </a:r>
-            <a:endParaRPr lang="en-US" sz="4800" dirty="0"/>
+              <a:t>Discussion questions</a:t>
+            </a:r>
+            <a:endParaRPr lang="en-US" sz="4000" dirty="0"/>
           </a:p>
         </p:txBody>
       </p:sp>
